--- a/Introduction of myself.pptx
+++ b/Introduction of myself.pptx
@@ -124,12 +124,25 @@
 </p:presentation>
 </file>
 
-<file path=ppt/revisionInfo.xml><?xml version="1.0" encoding="utf-8"?>
-<p1510:revInfo xmlns:a="http://schemas.openxmlformats.org/drawingml/2006/main" xmlns:r="http://schemas.openxmlformats.org/officeDocument/2006/relationships" xmlns:p1510="http://schemas.microsoft.com/office/powerpoint/2015/10/main">
-  <p1510:revLst>
-    <p1510:client id="{64B4343B-26A1-4C64-ABA8-727BF63801D5}" v="5" dt="2024-08-27T01:17:48.331"/>
-  </p1510:revLst>
-</p1510:revInfo>
+<file path=ppt/changesInfos/changesInfo1.xml><?xml version="1.0" encoding="utf-8"?>
+<pc:chgInfo xmlns:a="http://schemas.openxmlformats.org/drawingml/2006/main" xmlns:r="http://schemas.openxmlformats.org/officeDocument/2006/relationships" xmlns:ac="http://schemas.microsoft.com/office/drawing/2013/main/command" xmlns:pc="http://schemas.microsoft.com/office/powerpoint/2013/main/command">
+  <pc:docChgLst>
+    <pc:chgData name="Kwan To Wong" userId="6f797b44-5235-4fea-b848-f93001ac1fc4" providerId="ADAL" clId="{D8B8B226-6CDB-4145-918E-30B137396829}"/>
+    <pc:docChg chg="modSld">
+      <pc:chgData name="Kwan To Wong" userId="6f797b44-5235-4fea-b848-f93001ac1fc4" providerId="ADAL" clId="{D8B8B226-6CDB-4145-918E-30B137396829}" dt="2026-08-24T07:39:10.090" v="1"/>
+      <pc:docMkLst>
+        <pc:docMk/>
+      </pc:docMkLst>
+      <pc:sldChg chg="modAnim">
+        <pc:chgData name="Kwan To Wong" userId="6f797b44-5235-4fea-b848-f93001ac1fc4" providerId="ADAL" clId="{D8B8B226-6CDB-4145-918E-30B137396829}" dt="2026-08-24T07:39:10.090" v="1"/>
+        <pc:sldMkLst>
+          <pc:docMk/>
+          <pc:sldMk cId="102867471" sldId="262"/>
+        </pc:sldMkLst>
+      </pc:sldChg>
+    </pc:docChg>
+  </pc:docChgLst>
+</pc:chgInfo>
 </file>
 
 <file path=ppt/slideLayouts/slideLayout1.xml><?xml version="1.0" encoding="utf-8"?>
@@ -5419,15 +5432,7 @@
             <a:pPr algn="ctr"/>
             <a:r>
               <a:rPr lang="en-US" sz="3800" dirty="0"/>
-              <a:t>MSDA </a:t>
-            </a:r>
-            <a:r>
-              <a:rPr lang="en-US" sz="3800"/>
-              <a:t>Bootcamp 202</a:t>
-            </a:r>
-            <a:r>
-              <a:rPr lang="en-US" sz="3800" dirty="0"/>
-              <a:t>6</a:t>
+              <a:t>MSDA Bootcamp 2026</a:t>
             </a:r>
           </a:p>
           <a:p>
@@ -6257,6 +6262,112 @@
                                         <p:strVal val="visible"/>
                                       </p:to>
                                     </p:set>
+                                  </p:childTnLst>
+                                </p:cTn>
+                              </p:par>
+                            </p:childTnLst>
+                          </p:cTn>
+                        </p:par>
+                      </p:childTnLst>
+                    </p:cTn>
+                  </p:par>
+                  <p:par>
+                    <p:cTn id="39" fill="hold">
+                      <p:stCondLst>
+                        <p:cond delay="indefinite"/>
+                      </p:stCondLst>
+                      <p:childTnLst>
+                        <p:par>
+                          <p:cTn id="40" fill="hold">
+                            <p:stCondLst>
+                              <p:cond delay="0"/>
+                            </p:stCondLst>
+                            <p:childTnLst>
+                              <p:par>
+                                <p:cTn id="41" presetID="10" presetClass="entr" presetSubtype="0" fill="hold" nodeType="clickEffect">
+                                  <p:stCondLst>
+                                    <p:cond delay="0"/>
+                                  </p:stCondLst>
+                                  <p:childTnLst>
+                                    <p:set>
+                                      <p:cBhvr>
+                                        <p:cTn id="42" dur="1" fill="hold">
+                                          <p:stCondLst>
+                                            <p:cond delay="0"/>
+                                          </p:stCondLst>
+                                        </p:cTn>
+                                        <p:tgtEl>
+                                          <p:spTgt spid="3"/>
+                                        </p:tgtEl>
+                                        <p:attrNameLst>
+                                          <p:attrName>style.visibility</p:attrName>
+                                        </p:attrNameLst>
+                                      </p:cBhvr>
+                                      <p:to>
+                                        <p:strVal val="visible"/>
+                                      </p:to>
+                                    </p:set>
+                                    <p:animEffect transition="in" filter="fade">
+                                      <p:cBhvr>
+                                        <p:cTn id="43" dur="500"/>
+                                        <p:tgtEl>
+                                          <p:spTgt spid="3"/>
+                                        </p:tgtEl>
+                                      </p:cBhvr>
+                                    </p:animEffect>
+                                  </p:childTnLst>
+                                </p:cTn>
+                              </p:par>
+                            </p:childTnLst>
+                          </p:cTn>
+                        </p:par>
+                      </p:childTnLst>
+                    </p:cTn>
+                  </p:par>
+                  <p:par>
+                    <p:cTn id="44" fill="hold">
+                      <p:stCondLst>
+                        <p:cond delay="indefinite"/>
+                      </p:stCondLst>
+                      <p:childTnLst>
+                        <p:par>
+                          <p:cTn id="45" fill="hold">
+                            <p:stCondLst>
+                              <p:cond delay="0"/>
+                            </p:stCondLst>
+                            <p:childTnLst>
+                              <p:par>
+                                <p:cTn id="46" presetID="10" presetClass="entr" presetSubtype="0" fill="hold" nodeType="clickEffect">
+                                  <p:stCondLst>
+                                    <p:cond delay="0"/>
+                                  </p:stCondLst>
+                                  <p:childTnLst>
+                                    <p:set>
+                                      <p:cBhvr>
+                                        <p:cTn id="47" dur="1" fill="hold">
+                                          <p:stCondLst>
+                                            <p:cond delay="0"/>
+                                          </p:stCondLst>
+                                        </p:cTn>
+                                        <p:tgtEl>
+                                          <p:spTgt spid="7"/>
+                                        </p:tgtEl>
+                                        <p:attrNameLst>
+                                          <p:attrName>style.visibility</p:attrName>
+                                        </p:attrNameLst>
+                                      </p:cBhvr>
+                                      <p:to>
+                                        <p:strVal val="visible"/>
+                                      </p:to>
+                                    </p:set>
+                                    <p:animEffect transition="in" filter="fade">
+                                      <p:cBhvr>
+                                        <p:cTn id="48" dur="500"/>
+                                        <p:tgtEl>
+                                          <p:spTgt spid="7"/>
+                                        </p:tgtEl>
+                                      </p:cBhvr>
+                                    </p:animEffect>
                                   </p:childTnLst>
                                 </p:cTn>
                               </p:par>
